--- a/public/level3/downloads/slides/Level3_Lesson13_Slides.pptx
+++ b/public/level3/downloads/slides/Level3_Lesson13_Slides.pptx
@@ -536,7 +536,7 @@
           </a:p>
           <a:p>
             <a:r>
-              <a:t>Audio: the listening audio for this lesson (about 1:15) is coming soon. It will use computer-generated voices (Chatterbox TTS cloned from synthetic Kokoro-82M reference clips); no recordings of real people. Until it is ready, read the listening script (in the notes of the Before You Listen slide) with a volunteer. The names and the story are invented.</a:t>
+              <a:t>Audio: synthetic voices, computer-generated (Chatterbox TTS cloned from Kokoro-82M reference clips). No recordings of real people. The names and the story are invented.</a:t>
             </a:r>
           </a:p>
           <a:p>
@@ -1486,7 +1486,7 @@
           </a:p>
           <a:p>
             <a:r>
-              <a:t>The audio (about 1:15) is coming soon. When it is ready, it plays the talk once; press play again for play 2. Until then, read the listening script (at the end of these notes) with a volunteer.</a:t>
+              <a:t>The audio (L3_L13_listening.mp3, about 1:09) plays the talk once. Press play again for play 2. A third play is fine if the class needs it.</a:t>
             </a:r>
           </a:p>
           <a:p>
@@ -1496,7 +1496,7 @@
           </a:p>
           <a:p>
             <a:r>
-              <a:t>Audio: the listening audio for this lesson (about 1:15) is coming soon. It will use computer-generated voices (Chatterbox TTS cloned from synthetic Kokoro-82M reference clips); no recordings of real people. Until it is ready, read the listening script (in the notes of the Before You Listen slide) with a volunteer. The names and the story are invented.</a:t>
+              <a:t>Audio: synthetic voices, computer-generated (Chatterbox TTS cloned from Kokoro-82M reference clips). No recordings of real people. The names and the story are invented.</a:t>
             </a:r>
           </a:p>
           <a:p>
@@ -1507,76 +1507,6 @@
           <a:p>
             <a:r>
               <a:t>Picture: Twemoji graphics by Twitter, Inc. and other contributors (https://github.com/jdecked/twemoji), CC BY 4.0 (https://creativecommons.org/licenses/by/4.0/); resized and combined, with speech bubbles, signs, and labels (images/CREDITS.md).</a:t>
-            </a:r>
-          </a:p>
-          <a:p>
-            <a:r>
-              <a:t>Listening script (the audio is coming soon; until then, read it aloud with a volunteer at a normal, friendly speed):</a:t>
-            </a:r>
-          </a:p>
-          <a:p>
-            <a:r>
-              <a:t>Narrator: Lesson thirteen. Listening. Sofia was a Level 3 student. Tonight, she's talking to the class about her goals. Listen.</a:t>
-            </a:r>
-          </a:p>
-          <a:p>
-            <a:r>
-              <a:t>Mr. Novak: Welcome back, Sofia! Please tell us about your goals.</a:t>
-            </a:r>
-          </a:p>
-          <a:p>
-            <a:r>
-              <a:t>Sofia: Thank you. Three years ago, I came to this class. I was nervous, and my English was not very good.</a:t>
-            </a:r>
-          </a:p>
-          <a:p>
-            <a:r>
-              <a:t>Sofia: Now I work at a hotel, and I can talk with my coworkers in English.</a:t>
-            </a:r>
-          </a:p>
-          <a:p>
-            <a:r>
-              <a:t>Mr. Novak: That's great. What's your main goal?</a:t>
-            </a:r>
-          </a:p>
-          <a:p>
-            <a:r>
-              <a:t>Sofia: My main goal is to get a medical assistant certificate. I hope to work at a clinic.</a:t>
-            </a:r>
-          </a:p>
-          <a:p>
-            <a:r>
-              <a:t>Mr. Novak: How are you going to do that?</a:t>
-            </a:r>
-          </a:p>
-          <a:p>
-            <a:r>
-              <a:t>Sofia: First, I'm going to take a computer class at the community college. It starts in January.</a:t>
-            </a:r>
-          </a:p>
-          <a:p>
-            <a:r>
-              <a:t>Sofia: After that, I'll apply for the certificate program. And I hope to help my kids with their homework, too.</a:t>
-            </a:r>
-          </a:p>
-          <a:p>
-            <a:r>
-              <a:t>Mr. Novak: Any advice for the class?</a:t>
-            </a:r>
-          </a:p>
-          <a:p>
-            <a:r>
-              <a:t>Sofia: Yes. Come every week, and don't be afraid to make mistakes. You can do it!</a:t>
-            </a:r>
-          </a:p>
-          <a:p>
-            <a:r>
-              <a:t>Mr. Novak: Thank you, Sofia. Good luck!</a:t>
-            </a:r>
-          </a:p>
-          <a:p>
-            <a:r>
-              <a:t>Narrator: That's the end of the listening.</a:t>
             </a:r>
           </a:p>
         </p:txBody>
@@ -12004,7 +11934,7 @@
                 <a:ea typeface="Lexend Deca" pitchFamily="34" charset="-122"/>
                 <a:cs typeface="Lexend Deca" pitchFamily="34" charset="-120"/>
               </a:rPr>
-              <a:t>Audio: about 1:15. It plays once.</a:t>
+              <a:t>Audio: about 1:09. It plays once.</a:t>
             </a:r>
             <a:endParaRPr lang="en-US" sz="2200" dirty="0"/>
           </a:p>
@@ -30407,7 +30337,7 @@
                 <a:ea typeface="Lexend Deca" pitchFamily="34" charset="-122"/>
                 <a:cs typeface="Lexend Deca" pitchFamily="34" charset="-120"/>
               </a:rPr>
-              <a:t>Audio (coming soon): synthetic voices made with Chatterbox TTS (MIT License), cloned from short synthetic reference clips made with Kokoro-82M (Apache License 2.0). No recordings of real people. Each file will carry an inaudible Perth watermark marking it as AI-generated. Font: Lexend Deca (OFL 1.1).</a:t>
+              <a:t>Audio: synthetic voices made with Chatterbox TTS (MIT License), cloned from short synthetic reference clips made with Kokoro-82M (Apache License 2.0). No recordings of real people were used. Each file carries an inaudible Perth watermark marking it as AI-generated. Font: Lexend Deca (OFL 1.1).</a:t>
             </a:r>
             <a:endParaRPr lang="en-US" sz="1350" dirty="0" b="0"/>
           </a:p>
